--- a/slides/week03/ch03_dijkstra.pptx
+++ b/slides/week03/ch03_dijkstra.pptx
@@ -27,6 +27,7 @@
     <p:sldId id="275" r:id="rId26"/>
     <p:sldId id="276" r:id="rId27"/>
     <p:sldId id="277" r:id="rId28"/>
+    <p:sldId id="278" r:id="rId29"/>
   </p:sldIdLst>
   <p:notesMasterIdLst>
     <p:notesMasterId r:id="rId15"/>
@@ -592,7 +593,7 @@
           <a:lstStyle/>
           <a:p>
             <a:r>
-              <a:t>결과는 다익스트라와 같고 확정 노드는 줄어든다. 연습 3.2에서 휴리스틱에 1.5를 곱해 이 조건이 깨졌을 때 무엇을 잃는지 직접 측정한다.</a:t>
+              <a:t>정확한 남은 시간은 모르지만 하한은 안다. 도로는 직선보다 길고 최고 속도보다 빠를 수 없기 때문이다.</a:t>
             </a:r>
           </a:p>
         </p:txBody>
@@ -662,7 +663,7 @@
           <a:lstStyle/>
           <a:p>
             <a:r>
-              <a:t>이론적으로 더 좋은 알고리즘이 항상 더 빠른 것은 아니다. 무엇을 변경할 때마다 실행 시간을 측정하는 습관을 들인다.</a:t>
+              <a:t>결과는 다익스트라와 같고 확정 노드는 줄어든다. 연습 3.2에서 휴리스틱에 1.5를 곱해 이 조건이 깨졌을 때 무엇을 잃는지 직접 측정한다.</a:t>
             </a:r>
           </a:p>
         </p:txBody>
@@ -732,7 +733,7 @@
           <a:lstStyle/>
           <a:p>
             <a:r>
-              <a:t>시뮬레이션은 같은 도로망에서 수십만 번 질의하므로 전처리 비용을 회수한다. 축약 계층을 직접 구현하지는 않고 필요할 때 HTTP로 호출한다. 4장에서 서버에 연결해 우리 구현과 대조한다.</a:t>
+              <a:t>이론적으로 더 좋은 알고리즘이 항상 더 빠른 것은 아니다. 무엇을 변경할 때마다 실행 시간을 측정하는 습관을 들인다.</a:t>
             </a:r>
           </a:p>
         </p:txBody>
@@ -802,7 +803,7 @@
           <a:lstStyle/>
           <a:p>
             <a:r>
-              <a:t>4장부터는 오늘 만든 것을 정리한 smartmob.teaching.dijkstra의 shortest_path를 쓴다. 좌표를 받아 스냅까지 처리하고, 노드 목록과 소요시간과 확정 노드 수를 반환한다.</a:t>
+              <a:t>시뮬레이션은 같은 도로망에서 수십만 번 질의하므로 전처리 비용을 회수한다. 축약 계층을 직접 구현하지는 않고 필요할 때 HTTP로 호출한다. 4장에서 서버에 연결해 우리 구현과 대조한다.</a:t>
             </a:r>
           </a:p>
         </p:txBody>
@@ -872,6 +873,76 @@
           <a:lstStyle/>
           <a:p>
             <a:r>
+              <a:t>4장부터는 오늘 만든 것을 정리한 smartmob.teaching.dijkstra의 shortest_path를 쓴다. 좌표를 받아 스냅까지 처리하고, 노드 목록과 소요시간과 확정 노드 수를 반환한다.</a:t>
+            </a:r>
+          </a:p>
+        </p:txBody>
+      </p:sp>
+      <p:sp>
+        <p:nvSpPr>
+          <p:cNvPr id="4" name="Slide Number Placeholder 3"/>
+          <p:cNvSpPr>
+            <a:spLocks noGrp="1"/>
+          </p:cNvSpPr>
+          <p:nvPr>
+            <p:ph type="sldNum" idx="5" sz="quarter"/>
+          </p:nvPr>
+        </p:nvSpPr>
+        <p:spPr/>
+      </p:sp>
+    </p:spTree>
+  </p:cSld>
+  <p:clrMapOvr>
+    <a:masterClrMapping/>
+  </p:clrMapOvr>
+</p:notes>
+</file>
+
+<file path=ppt/notesSlides/notesSlide15.xml><?xml version="1.0" encoding="utf-8"?>
+<p:notes xmlns:a="http://schemas.openxmlformats.org/drawingml/2006/main" xmlns:p="http://schemas.openxmlformats.org/presentationml/2006/main" xmlns:r="http://schemas.openxmlformats.org/officeDocument/2006/relationships">
+  <p:cSld>
+    <p:spTree>
+      <p:nvGrpSpPr>
+        <p:cNvPr id="1" name=""/>
+        <p:cNvGrpSpPr/>
+        <p:nvPr/>
+      </p:nvGrpSpPr>
+      <p:grpSpPr>
+        <a:xfrm>
+          <a:off x="0" y="0"/>
+          <a:ext cx="0" cy="0"/>
+          <a:chOff x="0" y="0"/>
+          <a:chExt cx="0" cy="0"/>
+        </a:xfrm>
+      </p:grpSpPr>
+      <p:sp>
+        <p:nvSpPr>
+          <p:cNvPr id="2" name="Slide Image Placeholder 1"/>
+          <p:cNvSpPr>
+            <a:spLocks noGrp="1"/>
+          </p:cNvSpPr>
+          <p:nvPr>
+            <p:ph type="sldImg" idx="2"/>
+          </p:nvPr>
+        </p:nvSpPr>
+        <p:spPr/>
+      </p:sp>
+      <p:sp>
+        <p:nvSpPr>
+          <p:cNvPr id="3" name="Notes Placeholder 2"/>
+          <p:cNvSpPr>
+            <a:spLocks noGrp="1"/>
+          </p:cNvSpPr>
+          <p:nvPr>
+            <p:ph type="body" idx="3" sz="quarter"/>
+          </p:nvPr>
+        </p:nvSpPr>
+        <p:spPr/>
+        <p:txBody>
+          <a:bodyPr/>
+          <a:lstStyle/>
+          <a:p>
+            <a:r>
               <a:t>연습 3.3의 종료 조건이 어렵다. 두 탐색이 만나자마자 멈추면 최적해가 아니다. 질문이 나오면 4장 시작 전에 한 번 더 설명한다.</a:t>
             </a:r>
           </a:p>
@@ -1082,7 +1153,7 @@
           <a:lstStyle/>
           <a:p>
             <a:r>
-              <a:t>음수 비용이 있는 문제라면 다익스트라를 쓸 수 없고 벨만-포드를 쓴다. 통행료 환급 같은 경우다.</a:t>
+              <a:t>슬라이드는 개요만 다룬다. 세부 내용과 코드는 교재 원고와 실습 노트북에서 확인한다. 교재 저장소는 비공개이므로 초대받은 계정으로 로그인한 상태여야 주소가 열린다.</a:t>
             </a:r>
           </a:p>
         </p:txBody>
@@ -1152,7 +1223,7 @@
           <a:lstStyle/>
           <a:p>
             <a:r>
-              <a:t>2단계에서 매번 전체를 비교하면 느리다. 최소 힙을 쓰면 로그 시간에 끝난다. 같은 노드가 힙에 여러 번 들어갈 수 있어서 확정 집합으로 중복을 제외한다.</a:t>
+              <a:t>음수 비용이 있는 문제라면 다익스트라를 쓸 수 없고 벨만-포드를 쓴다. 통행료 환급 같은 경우다.</a:t>
             </a:r>
           </a:p>
         </p:txBody>
@@ -1222,7 +1293,7 @@
           <a:lstStyle/>
           <a:p>
             <a:r>
-              <a:t>마지막 줄이 중요하다. 83개짜리 경로를 얻으려고 4,500개를 확정했다. 이 손실이 A*의 출발점이 된다.</a:t>
+              <a:t>2단계에서 매번 전체를 비교하면 느리다. 최소 힙을 쓰면 로그 시간에 끝난다. 같은 노드가 힙에 여러 번 들어갈 수 있어서 확정 집합으로 중복을 제외한다.</a:t>
             </a:r>
           </a:p>
         </p:txBody>
@@ -1292,7 +1363,7 @@
           <a:lstStyle/>
           <a:p>
             <a:r>
-              <a:t>2장의 검증 습관과 같다. 코드가 실행된다는 것과 결과가 맞다는 것은 별개다.</a:t>
+              <a:t>마지막 줄이 중요하다. 83개짜리 경로를 얻으려고 4,500개를 확정했다. 이 손실이 A*의 출발점이 된다.</a:t>
             </a:r>
           </a:p>
         </p:txBody>
@@ -1362,7 +1433,7 @@
           <a:lstStyle/>
           <a:p>
             <a:r>
-              <a:t>대조 과정에서 경로가 아예 없는 노드 쌍을 발견한다. 시뮬레이터가 이 경우를 처리하지 않으면 실행 중 예외가 발생한다.</a:t>
+              <a:t>2장의 검증 습관과 같다. 코드가 실행된다는 것과 결과가 맞다는 것은 별개다.</a:t>
             </a:r>
           </a:p>
         </p:txBody>
@@ -1432,7 +1503,7 @@
           <a:lstStyle/>
           <a:p>
             <a:r>
-              <a:t>정확한 남은 시간은 모르지만 하한은 안다. 도로는 직선보다 길고 최고 속도보다 빠를 수 없기 때문이다.</a:t>
+              <a:t>대조 과정에서 경로가 아예 없는 노드 쌍을 발견한다. 시뮬레이터가 이 경우를 처리하지 않으면 실행 중 예외가 발생한다.</a:t>
             </a:r>
           </a:p>
         </p:txBody>
@@ -5067,6 +5138,136 @@
       <p:grpSpPr/>
       <p:sp>
         <p:nvSpPr>
+          <p:cNvPr id="2" name="Text Placeholder 1"/>
+          <p:cNvSpPr>
+            <a:spLocks noGrp="1"/>
+          </p:cNvSpPr>
+          <p:nvPr>
+            <p:ph type="body" idx="100"/>
+          </p:nvPr>
+        </p:nvSpPr>
+        <p:spPr/>
+        <p:txBody>
+          <a:bodyPr/>
+          <a:lstStyle/>
+          <a:p>
+            <a:r>
+              <a:t>03</a:t>
+            </a:r>
+          </a:p>
+        </p:txBody>
+      </p:sp>
+      <p:sp>
+        <p:nvSpPr>
+          <p:cNvPr id="3" name="Title 2"/>
+          <p:cNvSpPr>
+            <a:spLocks noGrp="1"/>
+          </p:cNvSpPr>
+          <p:nvPr>
+            <p:ph type="title" idx="101"/>
+          </p:nvPr>
+        </p:nvSpPr>
+        <p:spPr/>
+        <p:txBody>
+          <a:bodyPr/>
+          <a:lstStyle/>
+          <a:p>
+            <a:r>
+              <a:t>교재 3.3–3.4 구현과 검증</a:t>
+            </a:r>
+          </a:p>
+        </p:txBody>
+      </p:sp>
+      <p:sp>
+        <p:nvSpPr>
+          <p:cNvPr id="4" name="Text Placeholder 3"/>
+          <p:cNvSpPr>
+            <a:spLocks noGrp="1"/>
+          </p:cNvSpPr>
+          <p:nvPr>
+            <p:ph type="body" idx="102"/>
+          </p:nvPr>
+        </p:nvSpPr>
+        <p:spPr/>
+        <p:txBody>
+          <a:bodyPr/>
+          <a:lstStyle/>
+          <a:p>
+            <a:pPr>
+              <a:spcAft>
+                <a:spcPts val="1000"/>
+              </a:spcAft>
+            </a:pPr>
+            <a:r>
+              <a:rPr>
+                <a:solidFill>
+                  <a:srgbClr val="AFAFAF"/>
+                </a:solidFill>
+              </a:rPr>
+              <a:t>3.1  </a:t>
+            </a:r>
+            <a:r>
+              <a:t>구현 결과</a:t>
+            </a:r>
+          </a:p>
+          <a:p>
+            <a:pPr>
+              <a:spcAft>
+                <a:spcPts val="1000"/>
+              </a:spcAft>
+            </a:pPr>
+            <a:r>
+              <a:rPr>
+                <a:solidFill>
+                  <a:srgbClr val="AFAFAF"/>
+                </a:solidFill>
+              </a:rPr>
+              <a:t>3.2  </a:t>
+            </a:r>
+            <a:r>
+              <a:t>경로 연결 검증</a:t>
+            </a:r>
+          </a:p>
+          <a:p>
+            <a:pPr>
+              <a:spcAft>
+                <a:spcPts val="1000"/>
+              </a:spcAft>
+            </a:pPr>
+            <a:r>
+              <a:rPr>
+                <a:solidFill>
+                  <a:srgbClr val="AFAFAF"/>
+                </a:solidFill>
+              </a:rPr>
+              <a:t>3.3  </a:t>
+            </a:r>
+            <a:r>
+              <a:t>NetworkX 대조</a:t>
+            </a:r>
+          </a:p>
+        </p:txBody>
+      </p:sp>
+    </p:spTree>
+  </p:cSld>
+  <p:clrMapOvr>
+    <a:masterClrMapping/>
+  </p:clrMapOvr>
+</p:sld>
+</file>
+
+<file path=ppt/slides/slide11.xml><?xml version="1.0" encoding="utf-8"?>
+<p:sld xmlns:a="http://schemas.openxmlformats.org/drawingml/2006/main" xmlns:p="http://schemas.openxmlformats.org/presentationml/2006/main" xmlns:r="http://schemas.openxmlformats.org/officeDocument/2006/relationships">
+  <p:cSld>
+    <p:spTree>
+      <p:nvGrpSpPr>
+        <p:cNvPr id="1" name=""/>
+        <p:cNvGrpSpPr/>
+        <p:nvPr/>
+      </p:nvGrpSpPr>
+      <p:grpSpPr/>
+      <p:sp>
+        <p:nvSpPr>
           <p:cNvPr id="2" name="Title 1"/>
           <p:cNvSpPr>
             <a:spLocks noGrp="1"/>
@@ -5157,7 +5358,7 @@
           <a:lstStyle/>
           <a:p>
             <a:r>
-              <a:t>표 1. 하남시청에서 미사역까지 다익스트라 실행 결과</a:t>
+              <a:t>표 2. 하남시청에서 미사역까지 다익스트라 실행 결과</a:t>
             </a:r>
           </a:p>
         </p:txBody>
@@ -5610,148 +5811,6 @@
 </p:sld>
 </file>
 
-<file path=ppt/slides/slide11.xml><?xml version="1.0" encoding="utf-8"?>
-<p:sld xmlns:a="http://schemas.openxmlformats.org/drawingml/2006/main" xmlns:p="http://schemas.openxmlformats.org/presentationml/2006/main" xmlns:r="http://schemas.openxmlformats.org/officeDocument/2006/relationships">
-  <p:cSld>
-    <p:spTree>
-      <p:nvGrpSpPr>
-        <p:cNvPr id="1" name=""/>
-        <p:cNvGrpSpPr/>
-        <p:nvPr/>
-      </p:nvGrpSpPr>
-      <p:grpSpPr/>
-      <p:sp>
-        <p:nvSpPr>
-          <p:cNvPr id="2" name="Title 1"/>
-          <p:cNvSpPr>
-            <a:spLocks noGrp="1"/>
-          </p:cNvSpPr>
-          <p:nvPr>
-            <p:ph type="title" idx="100"/>
-          </p:nvPr>
-        </p:nvSpPr>
-        <p:spPr/>
-        <p:txBody>
-          <a:bodyPr/>
-          <a:lstStyle/>
-          <a:p>
-            <a:r>
-              <a:t>3.2 경로 연결 검증</a:t>
-            </a:r>
-          </a:p>
-        </p:txBody>
-      </p:sp>
-      <p:sp>
-        <p:nvSpPr>
-          <p:cNvPr id="3" name="Text Placeholder 2"/>
-          <p:cNvSpPr>
-            <a:spLocks noGrp="1"/>
-          </p:cNvSpPr>
-          <p:nvPr>
-            <p:ph type="body" idx="101"/>
-          </p:nvPr>
-        </p:nvSpPr>
-        <p:spPr/>
-        <p:txBody>
-          <a:bodyPr/>
-          <a:lstStyle/>
-          <a:p>
-            <a:r>
-              <a:t>3. 교재 3.3–3.4 구현과 검증</a:t>
-            </a:r>
-          </a:p>
-        </p:txBody>
-      </p:sp>
-      <p:sp>
-        <p:nvSpPr>
-          <p:cNvPr id="4" name="Text Placeholder 3"/>
-          <p:cNvSpPr>
-            <a:spLocks noGrp="1"/>
-          </p:cNvSpPr>
-          <p:nvPr>
-            <p:ph type="body" idx="102"/>
-          </p:nvPr>
-        </p:nvSpPr>
-        <p:spPr/>
-        <p:txBody>
-          <a:bodyPr/>
-          <a:lstStyle/>
-          <a:p>
-            <a:pPr/>
-            <a:r>
-              <a:t>검증 방법: 경로의 인접 노드 쌍마다 엣지 존재 확인</a:t>
-            </a:r>
-          </a:p>
-          <a:p>
-            <a:pPr/>
-            <a:r>
-              <a:t>엣지 소요시간을 다시 합산해 알고리즘 결과와 비교</a:t>
-            </a:r>
-          </a:p>
-          <a:p>
-            <a:pPr/>
-            <a:r>
-              <a:t>생략 시 경로 복원 배열의 오류를 발견하지 못함</a:t>
-            </a:r>
-          </a:p>
-        </p:txBody>
-      </p:sp>
-      <p:sp>
-        <p:nvSpPr>
-          <p:cNvPr id="25" name="Slide Number Placeholder 0"/>
-          <p:cNvSpPr>
-            <a:spLocks noGrp="1"/>
-          </p:cNvSpPr>
-          <p:nvPr>
-            <p:ph type="sldNum" sz="quarter" idx="4294967295"/>
-          </p:nvPr>
-        </p:nvSpPr>
-        <p:spPr>
-          <a:xfrm>
-            <a:off x="10591495" y="6355080"/>
-            <a:ext cx="914400" cy="274320"/>
-          </a:xfrm>
-          <a:prstGeom prst="rect">
-            <a:avLst/>
-          </a:prstGeom>
-          <a:extLst>
-            <a:ext uri="{C572A759-6A51-4108-AA02-DFA0A04FC94B}">
-              <ma14:wrappingTextBoxFlag xmlns:ma14="http://schemas.microsoft.com/office/mac/drawingml/2011/main" val="0"/>
-            </a:ext>
-          </a:extLst>
-        </p:spPr>
-        <p:txBody>
-          <a:bodyPr/>
-          <a:lstStyle>
-            <a:lvl1pPr>
-              <a:defRPr sz="1000">
-                <a:solidFill>
-                  <a:srgbClr val="AFAFAF"/>
-                </a:solidFill>
-                <a:latin typeface="Pretendard Medium"/>
-                <a:ea typeface="Pretendard Medium"/>
-                <a:cs typeface="Pretendard Medium"/>
-              </a:defRPr>
-            </a:lvl1pPr>
-          </a:lstStyle>
-          <a:p>
-            <a:pPr algn="r"/>
-            <a:fld id="{F7021451-1387-4CA6-816F-3879F97B5CBC}" type="slidenum">
-              <a:rPr b="0" lang="en-US"/>
-              <a:t>1004</a:t>
-            </a:fld>
-            <a:endParaRPr lang="en-US"/>
-          </a:p>
-        </p:txBody>
-      </p:sp>
-    </p:spTree>
-  </p:cSld>
-  <p:clrMapOvr>
-    <a:masterClrMapping/>
-  </p:clrMapOvr>
-</p:sld>
-</file>
-
 <file path=ppt/slides/slide12.xml><?xml version="1.0" encoding="utf-8"?>
 <p:sld xmlns:a="http://schemas.openxmlformats.org/drawingml/2006/main" xmlns:p="http://schemas.openxmlformats.org/presentationml/2006/main" xmlns:r="http://schemas.openxmlformats.org/officeDocument/2006/relationships">
   <p:cSld>
@@ -5778,7 +5837,7 @@
           <a:lstStyle/>
           <a:p>
             <a:r>
-              <a:t>3.3 NetworkX 대조</a:t>
+              <a:t>3.2 경로 연결 검증</a:t>
             </a:r>
           </a:p>
         </p:txBody>
@@ -5821,25 +5880,19 @@
           <a:p>
             <a:pPr/>
             <a:r>
-              <a:t>무작위 50쌍 대조 결과: 불일치 0건</a:t>
+              <a:t>검증 방법: 경로의 인접 노드 쌍마다 엣지 존재 확인</a:t>
             </a:r>
           </a:p>
           <a:p>
             <a:pPr/>
             <a:r>
-              <a:t>부수 확인: 무작위 200쌍 중 경로 없음 6% 남짓</a:t>
+              <a:t>엣지 소요시간을 다시 합산해 알고리즘 결과와 비교</a:t>
             </a:r>
           </a:p>
           <a:p>
             <a:pPr/>
             <a:r>
-              <a:t>원인: 일방통행 막다른 구간, 시 경계에서 분리된 부분</a:t>
-            </a:r>
-          </a:p>
-          <a:p>
-            <a:pPr/>
-            <a:r>
-              <a:t>시뮬레이터 요구사항: 경로 없음을 예외 처리</a:t>
+              <a:t>생략 시 경로 복원 배열의 오류를 발견하지 못함</a:t>
             </a:r>
           </a:p>
         </p:txBody>
@@ -5912,12 +5965,12 @@
       <p:grpSpPr/>
       <p:sp>
         <p:nvSpPr>
-          <p:cNvPr id="2" name="Text Placeholder 1"/>
-          <p:cNvSpPr>
-            <a:spLocks noGrp="1"/>
-          </p:cNvSpPr>
-          <p:nvPr>
-            <p:ph type="body" idx="100"/>
+          <p:cNvPr id="2" name="Title 1"/>
+          <p:cNvSpPr>
+            <a:spLocks noGrp="1"/>
+          </p:cNvSpPr>
+          <p:nvPr>
+            <p:ph type="title" idx="100"/>
           </p:nvPr>
         </p:nvSpPr>
         <p:spPr/>
@@ -5926,19 +5979,19 @@
           <a:lstStyle/>
           <a:p>
             <a:r>
-              <a:t>04</a:t>
-            </a:r>
-          </a:p>
-        </p:txBody>
-      </p:sp>
-      <p:sp>
-        <p:nvSpPr>
-          <p:cNvPr id="3" name="Title 2"/>
-          <p:cNvSpPr>
-            <a:spLocks noGrp="1"/>
-          </p:cNvSpPr>
-          <p:nvPr>
-            <p:ph type="title" idx="101"/>
+              <a:t>3.3 NetworkX 대조</a:t>
+            </a:r>
+          </a:p>
+        </p:txBody>
+      </p:sp>
+      <p:sp>
+        <p:nvSpPr>
+          <p:cNvPr id="3" name="Text Placeholder 2"/>
+          <p:cNvSpPr>
+            <a:spLocks noGrp="1"/>
+          </p:cNvSpPr>
+          <p:nvPr>
+            <p:ph type="body" idx="101"/>
           </p:nvPr>
         </p:nvSpPr>
         <p:spPr/>
@@ -5947,7 +6000,7 @@
           <a:lstStyle/>
           <a:p>
             <a:r>
-              <a:t>교재 3.5 A* 확장</a:t>
+              <a:t>3. 교재 3.3–3.4 구현과 검증</a:t>
             </a:r>
           </a:p>
         </p:txBody>
@@ -5967,40 +6020,76 @@
           <a:bodyPr/>
           <a:lstStyle/>
           <a:p>
-            <a:pPr>
-              <a:spcAft>
-                <a:spcPts val="1000"/>
-              </a:spcAft>
-            </a:pPr>
-            <a:r>
-              <a:rPr>
+            <a:pPr/>
+            <a:r>
+              <a:t>무작위 50쌍 대조 결과: 불일치 0건</a:t>
+            </a:r>
+          </a:p>
+          <a:p>
+            <a:pPr/>
+            <a:r>
+              <a:t>부수 확인: 무작위 200쌍 중 경로 없음 6% 남짓</a:t>
+            </a:r>
+          </a:p>
+          <a:p>
+            <a:pPr/>
+            <a:r>
+              <a:t>원인: 일방통행 막다른 구간, 시 경계에서 분리된 부분</a:t>
+            </a:r>
+          </a:p>
+          <a:p>
+            <a:pPr/>
+            <a:r>
+              <a:t>시뮬레이터 요구사항: 경로 없음을 예외 처리</a:t>
+            </a:r>
+          </a:p>
+        </p:txBody>
+      </p:sp>
+      <p:sp>
+        <p:nvSpPr>
+          <p:cNvPr id="25" name="Slide Number Placeholder 0"/>
+          <p:cNvSpPr>
+            <a:spLocks noGrp="1"/>
+          </p:cNvSpPr>
+          <p:nvPr>
+            <p:ph type="sldNum" sz="quarter" idx="4294967295"/>
+          </p:nvPr>
+        </p:nvSpPr>
+        <p:spPr>
+          <a:xfrm>
+            <a:off x="10591495" y="6355080"/>
+            <a:ext cx="914400" cy="274320"/>
+          </a:xfrm>
+          <a:prstGeom prst="rect">
+            <a:avLst/>
+          </a:prstGeom>
+          <a:extLst>
+            <a:ext uri="{C572A759-6A51-4108-AA02-DFA0A04FC94B}">
+              <ma14:wrappingTextBoxFlag xmlns:ma14="http://schemas.microsoft.com/office/mac/drawingml/2011/main" val="0"/>
+            </a:ext>
+          </a:extLst>
+        </p:spPr>
+        <p:txBody>
+          <a:bodyPr/>
+          <a:lstStyle>
+            <a:lvl1pPr>
+              <a:defRPr sz="1000">
                 <a:solidFill>
                   <a:srgbClr val="AFAFAF"/>
                 </a:solidFill>
-              </a:rPr>
-              <a:t>4.1  </a:t>
-            </a:r>
-            <a:r>
-              <a:t>목적지 방향 우선 탐색</a:t>
-            </a:r>
-          </a:p>
-          <a:p>
-            <a:pPr>
-              <a:spcAft>
-                <a:spcPts val="1000"/>
-              </a:spcAft>
-            </a:pPr>
-            <a:r>
-              <a:rPr>
-                <a:solidFill>
-                  <a:srgbClr val="AFAFAF"/>
-                </a:solidFill>
-              </a:rPr>
-              <a:t>4.2  </a:t>
-            </a:r>
-            <a:r>
-              <a:t>허용 가능 조건</a:t>
-            </a:r>
+                <a:latin typeface="Pretendard Medium"/>
+                <a:ea typeface="Pretendard Medium"/>
+                <a:cs typeface="Pretendard Medium"/>
+              </a:defRPr>
+            </a:lvl1pPr>
+          </a:lstStyle>
+          <a:p>
+            <a:pPr algn="r"/>
+            <a:fld id="{F7021451-1387-4CA6-816F-3879F97B5CBC}" type="slidenum">
+              <a:rPr b="0" lang="en-US"/>
+              <a:t>1004</a:t>
+            </a:fld>
+            <a:endParaRPr lang="en-US"/>
           </a:p>
         </p:txBody>
       </p:sp>
@@ -6024,12 +6113,12 @@
       <p:grpSpPr/>
       <p:sp>
         <p:nvSpPr>
-          <p:cNvPr id="2" name="Title 1"/>
-          <p:cNvSpPr>
-            <a:spLocks noGrp="1"/>
-          </p:cNvSpPr>
-          <p:nvPr>
-            <p:ph type="title" idx="100"/>
+          <p:cNvPr id="2" name="Text Placeholder 1"/>
+          <p:cNvSpPr>
+            <a:spLocks noGrp="1"/>
+          </p:cNvSpPr>
+          <p:nvPr>
+            <p:ph type="body" idx="100"/>
           </p:nvPr>
         </p:nvSpPr>
         <p:spPr/>
@@ -6038,19 +6127,19 @@
           <a:lstStyle/>
           <a:p>
             <a:r>
-              <a:t>4.1 목적지 방향 우선 탐색</a:t>
-            </a:r>
-          </a:p>
-        </p:txBody>
-      </p:sp>
-      <p:sp>
-        <p:nvSpPr>
-          <p:cNvPr id="3" name="Text Placeholder 2"/>
-          <p:cNvSpPr>
-            <a:spLocks noGrp="1"/>
-          </p:cNvSpPr>
-          <p:nvPr>
-            <p:ph type="body" idx="101"/>
+              <a:t>04</a:t>
+            </a:r>
+          </a:p>
+        </p:txBody>
+      </p:sp>
+      <p:sp>
+        <p:nvSpPr>
+          <p:cNvPr id="3" name="Title 2"/>
+          <p:cNvSpPr>
+            <a:spLocks noGrp="1"/>
+          </p:cNvSpPr>
+          <p:nvPr>
+            <p:ph type="title" idx="101"/>
           </p:nvPr>
         </p:nvSpPr>
         <p:spPr/>
@@ -6059,7 +6148,7 @@
           <a:lstStyle/>
           <a:p>
             <a:r>
-              <a:t>4. 교재 3.5 A* 확장</a:t>
+              <a:t>교재 3.5 A* 확장</a:t>
             </a:r>
           </a:p>
         </p:txBody>
@@ -6079,76 +6168,40 @@
           <a:bodyPr/>
           <a:lstStyle/>
           <a:p>
-            <a:pPr/>
-            <a:r>
-              <a:t>다익스트라의 손실: 목적지 반대 방향까지 균등 확장</a:t>
-            </a:r>
-          </a:p>
-          <a:p>
-            <a:pPr/>
-            <a:r>
-              <a:t>개선: 남은 시간의 하한 h를 우선순위에 추가</a:t>
-            </a:r>
-          </a:p>
-          <a:p>
-            <a:pPr/>
-            <a:r>
-              <a:t>h = 직선거리 ÷ 도로망 최고 속도</a:t>
-            </a:r>
-          </a:p>
-          <a:p>
-            <a:pPr/>
-            <a:r>
-              <a:t>우선순위 = 지금까지 소요시간 + h</a:t>
-            </a:r>
-          </a:p>
-        </p:txBody>
-      </p:sp>
-      <p:sp>
-        <p:nvSpPr>
-          <p:cNvPr id="25" name="Slide Number Placeholder 0"/>
-          <p:cNvSpPr>
-            <a:spLocks noGrp="1"/>
-          </p:cNvSpPr>
-          <p:nvPr>
-            <p:ph type="sldNum" sz="quarter" idx="4294967295"/>
-          </p:nvPr>
-        </p:nvSpPr>
-        <p:spPr>
-          <a:xfrm>
-            <a:off x="10591495" y="6355080"/>
-            <a:ext cx="914400" cy="274320"/>
-          </a:xfrm>
-          <a:prstGeom prst="rect">
-            <a:avLst/>
-          </a:prstGeom>
-          <a:extLst>
-            <a:ext uri="{C572A759-6A51-4108-AA02-DFA0A04FC94B}">
-              <ma14:wrappingTextBoxFlag xmlns:ma14="http://schemas.microsoft.com/office/mac/drawingml/2011/main" val="0"/>
-            </a:ext>
-          </a:extLst>
-        </p:spPr>
-        <p:txBody>
-          <a:bodyPr/>
-          <a:lstStyle>
-            <a:lvl1pPr>
-              <a:defRPr sz="1000">
+            <a:pPr>
+              <a:spcAft>
+                <a:spcPts val="1000"/>
+              </a:spcAft>
+            </a:pPr>
+            <a:r>
+              <a:rPr>
                 <a:solidFill>
                   <a:srgbClr val="AFAFAF"/>
                 </a:solidFill>
-                <a:latin typeface="Pretendard Medium"/>
-                <a:ea typeface="Pretendard Medium"/>
-                <a:cs typeface="Pretendard Medium"/>
-              </a:defRPr>
-            </a:lvl1pPr>
-          </a:lstStyle>
-          <a:p>
-            <a:pPr algn="r"/>
-            <a:fld id="{F7021451-1387-4CA6-816F-3879F97B5CBC}" type="slidenum">
-              <a:rPr b="0" lang="en-US"/>
-              <a:t>1004</a:t>
-            </a:fld>
-            <a:endParaRPr lang="en-US"/>
+              </a:rPr>
+              <a:t>4.1  </a:t>
+            </a:r>
+            <a:r>
+              <a:t>목적지 방향 우선 탐색</a:t>
+            </a:r>
+          </a:p>
+          <a:p>
+            <a:pPr>
+              <a:spcAft>
+                <a:spcPts val="1000"/>
+              </a:spcAft>
+            </a:pPr>
+            <a:r>
+              <a:rPr>
+                <a:solidFill>
+                  <a:srgbClr val="AFAFAF"/>
+                </a:solidFill>
+              </a:rPr>
+              <a:t>4.2  </a:t>
+            </a:r>
+            <a:r>
+              <a:t>허용 가능 조건</a:t>
+            </a:r>
           </a:p>
         </p:txBody>
       </p:sp>
@@ -6186,7 +6239,7 @@
           <a:lstStyle/>
           <a:p>
             <a:r>
-              <a:t>4.2 허용 가능 조건</a:t>
+              <a:t>4.1 목적지 방향 우선 탐색</a:t>
             </a:r>
           </a:p>
         </p:txBody>
@@ -6229,25 +6282,25 @@
           <a:p>
             <a:pPr/>
             <a:r>
-              <a:t>조건: h가 실제 남은 시간보다 작거나 같을 것</a:t>
+              <a:t>다익스트라의 손실: 목적지 반대 방향까지 균등 확장</a:t>
             </a:r>
           </a:p>
           <a:p>
             <a:pPr/>
             <a:r>
-              <a:t>용어: 이 조건을 허용 가능(admissible)하다고 함</a:t>
+              <a:t>개선: 남은 시간의 하한 h를 우선순위에 추가</a:t>
             </a:r>
           </a:p>
           <a:p>
             <a:pPr/>
             <a:r>
-              <a:t>위반 시 더 짧은 경로의 우선순위가 낮아져 최적해 상실</a:t>
+              <a:t>h = 직선거리 ÷ 도로망 최고 속도</a:t>
             </a:r>
           </a:p>
           <a:p>
             <a:pPr/>
             <a:r>
-              <a:t>직선거리 ÷ 최고 속도는 항상 실제보다 작으므로 안전</a:t>
+              <a:t>우선순위 = 지금까지 소요시간 + h</a:t>
             </a:r>
           </a:p>
         </p:txBody>
@@ -6320,12 +6373,12 @@
       <p:grpSpPr/>
       <p:sp>
         <p:nvSpPr>
-          <p:cNvPr id="2" name="Text Placeholder 1"/>
-          <p:cNvSpPr>
-            <a:spLocks noGrp="1"/>
-          </p:cNvSpPr>
-          <p:nvPr>
-            <p:ph type="body" idx="100"/>
+          <p:cNvPr id="2" name="Title 1"/>
+          <p:cNvSpPr>
+            <a:spLocks noGrp="1"/>
+          </p:cNvSpPr>
+          <p:nvPr>
+            <p:ph type="title" idx="100"/>
           </p:nvPr>
         </p:nvSpPr>
         <p:spPr/>
@@ -6334,19 +6387,19 @@
           <a:lstStyle/>
           <a:p>
             <a:r>
-              <a:t>05</a:t>
-            </a:r>
-          </a:p>
-        </p:txBody>
-      </p:sp>
-      <p:sp>
-        <p:nvSpPr>
-          <p:cNvPr id="3" name="Title 2"/>
-          <p:cNvSpPr>
-            <a:spLocks noGrp="1"/>
-          </p:cNvSpPr>
-          <p:nvPr>
-            <p:ph type="title" idx="101"/>
+              <a:t>4.2 허용 가능 조건</a:t>
+            </a:r>
+          </a:p>
+        </p:txBody>
+      </p:sp>
+      <p:sp>
+        <p:nvSpPr>
+          <p:cNvPr id="3" name="Text Placeholder 2"/>
+          <p:cNvSpPr>
+            <a:spLocks noGrp="1"/>
+          </p:cNvSpPr>
+          <p:nvPr>
+            <p:ph type="body" idx="101"/>
           </p:nvPr>
         </p:nvSpPr>
         <p:spPr/>
@@ -6355,7 +6408,7 @@
           <a:lstStyle/>
           <a:p>
             <a:r>
-              <a:t>교재 3.6–3.7 성능과 엔진</a:t>
+              <a:t>4. 교재 3.5 A* 확장</a:t>
             </a:r>
           </a:p>
         </p:txBody>
@@ -6375,40 +6428,76 @@
           <a:bodyPr/>
           <a:lstStyle/>
           <a:p>
-            <a:pPr>
-              <a:spcAft>
-                <a:spcPts val="1000"/>
-              </a:spcAft>
-            </a:pPr>
-            <a:r>
-              <a:rPr>
+            <a:pPr/>
+            <a:r>
+              <a:t>조건: h가 실제 남은 시간보다 작거나 같을 것</a:t>
+            </a:r>
+          </a:p>
+          <a:p>
+            <a:pPr/>
+            <a:r>
+              <a:t>용어: 이 조건을 허용 가능(admissible)하다고 함</a:t>
+            </a:r>
+          </a:p>
+          <a:p>
+            <a:pPr/>
+            <a:r>
+              <a:t>위반 시 더 짧은 경로의 우선순위가 낮아져 최적해 상실</a:t>
+            </a:r>
+          </a:p>
+          <a:p>
+            <a:pPr/>
+            <a:r>
+              <a:t>직선거리 ÷ 최고 속도는 항상 실제보다 작으므로 안전</a:t>
+            </a:r>
+          </a:p>
+        </p:txBody>
+      </p:sp>
+      <p:sp>
+        <p:nvSpPr>
+          <p:cNvPr id="25" name="Slide Number Placeholder 0"/>
+          <p:cNvSpPr>
+            <a:spLocks noGrp="1"/>
+          </p:cNvSpPr>
+          <p:nvPr>
+            <p:ph type="sldNum" sz="quarter" idx="4294967295"/>
+          </p:nvPr>
+        </p:nvSpPr>
+        <p:spPr>
+          <a:xfrm>
+            <a:off x="10591495" y="6355080"/>
+            <a:ext cx="914400" cy="274320"/>
+          </a:xfrm>
+          <a:prstGeom prst="rect">
+            <a:avLst/>
+          </a:prstGeom>
+          <a:extLst>
+            <a:ext uri="{C572A759-6A51-4108-AA02-DFA0A04FC94B}">
+              <ma14:wrappingTextBoxFlag xmlns:ma14="http://schemas.microsoft.com/office/mac/drawingml/2011/main" val="0"/>
+            </a:ext>
+          </a:extLst>
+        </p:spPr>
+        <p:txBody>
+          <a:bodyPr/>
+          <a:lstStyle>
+            <a:lvl1pPr>
+              <a:defRPr sz="1000">
                 <a:solidFill>
                   <a:srgbClr val="AFAFAF"/>
                 </a:solidFill>
-              </a:rPr>
-              <a:t>5.1  </a:t>
-            </a:r>
-            <a:r>
-              <a:t>확정 노드와 실행 시간</a:t>
-            </a:r>
-          </a:p>
-          <a:p>
-            <a:pPr>
-              <a:spcAft>
-                <a:spcPts val="1000"/>
-              </a:spcAft>
-            </a:pPr>
-            <a:r>
-              <a:rPr>
-                <a:solidFill>
-                  <a:srgbClr val="AFAFAF"/>
-                </a:solidFill>
-              </a:rPr>
-              <a:t>5.2  </a:t>
-            </a:r>
-            <a:r>
-              <a:t>실제 엔진의 축약 계층</a:t>
-            </a:r>
+                <a:latin typeface="Pretendard Medium"/>
+                <a:ea typeface="Pretendard Medium"/>
+                <a:cs typeface="Pretendard Medium"/>
+              </a:defRPr>
+            </a:lvl1pPr>
+          </a:lstStyle>
+          <a:p>
+            <a:pPr algn="r"/>
+            <a:fld id="{F7021451-1387-4CA6-816F-3879F97B5CBC}" type="slidenum">
+              <a:rPr b="0" lang="en-US"/>
+              <a:t>1004</a:t>
+            </a:fld>
+            <a:endParaRPr lang="en-US"/>
           </a:p>
         </p:txBody>
       </p:sp>
@@ -6432,6 +6521,118 @@
       <p:grpSpPr/>
       <p:sp>
         <p:nvSpPr>
+          <p:cNvPr id="2" name="Text Placeholder 1"/>
+          <p:cNvSpPr>
+            <a:spLocks noGrp="1"/>
+          </p:cNvSpPr>
+          <p:nvPr>
+            <p:ph type="body" idx="100"/>
+          </p:nvPr>
+        </p:nvSpPr>
+        <p:spPr/>
+        <p:txBody>
+          <a:bodyPr/>
+          <a:lstStyle/>
+          <a:p>
+            <a:r>
+              <a:t>05</a:t>
+            </a:r>
+          </a:p>
+        </p:txBody>
+      </p:sp>
+      <p:sp>
+        <p:nvSpPr>
+          <p:cNvPr id="3" name="Title 2"/>
+          <p:cNvSpPr>
+            <a:spLocks noGrp="1"/>
+          </p:cNvSpPr>
+          <p:nvPr>
+            <p:ph type="title" idx="101"/>
+          </p:nvPr>
+        </p:nvSpPr>
+        <p:spPr/>
+        <p:txBody>
+          <a:bodyPr/>
+          <a:lstStyle/>
+          <a:p>
+            <a:r>
+              <a:t>교재 3.6–3.7 성능과 엔진</a:t>
+            </a:r>
+          </a:p>
+        </p:txBody>
+      </p:sp>
+      <p:sp>
+        <p:nvSpPr>
+          <p:cNvPr id="4" name="Text Placeholder 3"/>
+          <p:cNvSpPr>
+            <a:spLocks noGrp="1"/>
+          </p:cNvSpPr>
+          <p:nvPr>
+            <p:ph type="body" idx="102"/>
+          </p:nvPr>
+        </p:nvSpPr>
+        <p:spPr/>
+        <p:txBody>
+          <a:bodyPr/>
+          <a:lstStyle/>
+          <a:p>
+            <a:pPr>
+              <a:spcAft>
+                <a:spcPts val="1000"/>
+              </a:spcAft>
+            </a:pPr>
+            <a:r>
+              <a:rPr>
+                <a:solidFill>
+                  <a:srgbClr val="AFAFAF"/>
+                </a:solidFill>
+              </a:rPr>
+              <a:t>5.1  </a:t>
+            </a:r>
+            <a:r>
+              <a:t>확정 노드와 실행 시간</a:t>
+            </a:r>
+          </a:p>
+          <a:p>
+            <a:pPr>
+              <a:spcAft>
+                <a:spcPts val="1000"/>
+              </a:spcAft>
+            </a:pPr>
+            <a:r>
+              <a:rPr>
+                <a:solidFill>
+                  <a:srgbClr val="AFAFAF"/>
+                </a:solidFill>
+              </a:rPr>
+              <a:t>5.2  </a:t>
+            </a:r>
+            <a:r>
+              <a:t>실제 엔진의 축약 계층</a:t>
+            </a:r>
+          </a:p>
+        </p:txBody>
+      </p:sp>
+    </p:spTree>
+  </p:cSld>
+  <p:clrMapOvr>
+    <a:masterClrMapping/>
+  </p:clrMapOvr>
+</p:sld>
+</file>
+
+<file path=ppt/slides/slide18.xml><?xml version="1.0" encoding="utf-8"?>
+<p:sld xmlns:a="http://schemas.openxmlformats.org/drawingml/2006/main" xmlns:p="http://schemas.openxmlformats.org/presentationml/2006/main" xmlns:r="http://schemas.openxmlformats.org/officeDocument/2006/relationships">
+  <p:cSld>
+    <p:spTree>
+      <p:nvGrpSpPr>
+        <p:cNvPr id="1" name=""/>
+        <p:cNvGrpSpPr/>
+        <p:nvPr/>
+      </p:nvGrpSpPr>
+      <p:grpSpPr/>
+      <p:sp>
+        <p:nvSpPr>
           <p:cNvPr id="2" name="Title 1"/>
           <p:cNvSpPr>
             <a:spLocks noGrp="1"/>
@@ -6528,7 +6729,7 @@
           <a:lstStyle/>
           <a:p>
             <a:r>
-              <a:t>표 2. 무작위 30쌍의 중앙값 비교</a:t>
+              <a:t>표 3. 무작위 30쌍의 중앙값 비교</a:t>
             </a:r>
           </a:p>
         </p:txBody>
@@ -6940,7 +7141,7 @@
 </p:sld>
 </file>
 
-<file path=ppt/slides/slide18.xml><?xml version="1.0" encoding="utf-8"?>
+<file path=ppt/slides/slide19.xml><?xml version="1.0" encoding="utf-8"?>
 <p:sld xmlns:a="http://schemas.openxmlformats.org/drawingml/2006/main" xmlns:p="http://schemas.openxmlformats.org/presentationml/2006/main" xmlns:r="http://schemas.openxmlformats.org/officeDocument/2006/relationships">
   <p:cSld>
     <p:spTree>
@@ -7077,118 +7278,6 @@
               <a:t>1004</a:t>
             </a:fld>
             <a:endParaRPr lang="en-US"/>
-          </a:p>
-        </p:txBody>
-      </p:sp>
-    </p:spTree>
-  </p:cSld>
-  <p:clrMapOvr>
-    <a:masterClrMapping/>
-  </p:clrMapOvr>
-</p:sld>
-</file>
-
-<file path=ppt/slides/slide19.xml><?xml version="1.0" encoding="utf-8"?>
-<p:sld xmlns:a="http://schemas.openxmlformats.org/drawingml/2006/main" xmlns:p="http://schemas.openxmlformats.org/presentationml/2006/main" xmlns:r="http://schemas.openxmlformats.org/officeDocument/2006/relationships">
-  <p:cSld>
-    <p:spTree>
-      <p:nvGrpSpPr>
-        <p:cNvPr id="1" name=""/>
-        <p:cNvGrpSpPr/>
-        <p:nvPr/>
-      </p:nvGrpSpPr>
-      <p:grpSpPr/>
-      <p:sp>
-        <p:nvSpPr>
-          <p:cNvPr id="2" name="Text Placeholder 1"/>
-          <p:cNvSpPr>
-            <a:spLocks noGrp="1"/>
-          </p:cNvSpPr>
-          <p:nvPr>
-            <p:ph type="body" idx="100"/>
-          </p:nvPr>
-        </p:nvSpPr>
-        <p:spPr/>
-        <p:txBody>
-          <a:bodyPr/>
-          <a:lstStyle/>
-          <a:p>
-            <a:r>
-              <a:t>06</a:t>
-            </a:r>
-          </a:p>
-        </p:txBody>
-      </p:sp>
-      <p:sp>
-        <p:nvSpPr>
-          <p:cNvPr id="3" name="Title 2"/>
-          <p:cNvSpPr>
-            <a:spLocks noGrp="1"/>
-          </p:cNvSpPr>
-          <p:nvPr>
-            <p:ph type="title" idx="101"/>
-          </p:nvPr>
-        </p:nvSpPr>
-        <p:spPr/>
-        <p:txBody>
-          <a:bodyPr/>
-          <a:lstStyle/>
-          <a:p>
-            <a:r>
-              <a:t>정리와 연습</a:t>
-            </a:r>
-          </a:p>
-        </p:txBody>
-      </p:sp>
-      <p:sp>
-        <p:nvSpPr>
-          <p:cNvPr id="4" name="Text Placeholder 3"/>
-          <p:cNvSpPr>
-            <a:spLocks noGrp="1"/>
-          </p:cNvSpPr>
-          <p:nvPr>
-            <p:ph type="body" idx="102"/>
-          </p:nvPr>
-        </p:nvSpPr>
-        <p:spPr/>
-        <p:txBody>
-          <a:bodyPr/>
-          <a:lstStyle/>
-          <a:p>
-            <a:pPr>
-              <a:spcAft>
-                <a:spcPts val="1000"/>
-              </a:spcAft>
-            </a:pPr>
-            <a:r>
-              <a:rPr>
-                <a:solidFill>
-                  <a:srgbClr val="AFAFAF"/>
-                </a:solidFill>
-              </a:rPr>
-              <a:t>6.1  </a:t>
-            </a:r>
-            <a:r>
-              <a:t>오늘의 정리</a:t>
-            </a:r>
-          </a:p>
-          <a:p>
-            <a:pPr>
-              <a:spcAft>
-                <a:spcPts val="1000"/>
-              </a:spcAft>
-            </a:pPr>
-            <a:r>
-              <a:rPr>
-                <a:solidFill>
-                  <a:srgbClr val="AFAFAF"/>
-                </a:solidFill>
-              </a:rPr>
-              <a:t>6.2  </a:t>
-            </a:r>
-            <a:r>
-              <a:t>연습과 다음 장</a:t>
-            </a:r>
           </a:p>
         </p:txBody>
       </p:sp>
@@ -7360,7 +7449,7 @@
                           </a:solidFill>
                           <a:latin typeface="Pretendard Medium"/>
                         </a:rPr>
-                        <a:t>1.1 하남시청에서 미사역까지  ·  1.2 학습 목표</a:t>
+                        <a:t>1.1 하남시청에서 미사역까지  ·  1.2 학습 목표  ·  1.3 교재와 실습을 여는 곳</a:t>
                       </a:r>
                     </a:p>
                   </a:txBody>
@@ -8007,12 +8096,12 @@
       <p:grpSpPr/>
       <p:sp>
         <p:nvSpPr>
-          <p:cNvPr id="2" name="Title 1"/>
-          <p:cNvSpPr>
-            <a:spLocks noGrp="1"/>
-          </p:cNvSpPr>
-          <p:nvPr>
-            <p:ph type="title" idx="100"/>
+          <p:cNvPr id="2" name="Text Placeholder 1"/>
+          <p:cNvSpPr>
+            <a:spLocks noGrp="1"/>
+          </p:cNvSpPr>
+          <p:nvPr>
+            <p:ph type="body" idx="100"/>
           </p:nvPr>
         </p:nvSpPr>
         <p:spPr/>
@@ -8021,19 +8110,19 @@
           <a:lstStyle/>
           <a:p>
             <a:r>
-              <a:t>6.1 오늘의 정리</a:t>
-            </a:r>
-          </a:p>
-        </p:txBody>
-      </p:sp>
-      <p:sp>
-        <p:nvSpPr>
-          <p:cNvPr id="3" name="Text Placeholder 2"/>
-          <p:cNvSpPr>
-            <a:spLocks noGrp="1"/>
-          </p:cNvSpPr>
-          <p:nvPr>
-            <p:ph type="body" idx="101"/>
+              <a:t>06</a:t>
+            </a:r>
+          </a:p>
+        </p:txBody>
+      </p:sp>
+      <p:sp>
+        <p:nvSpPr>
+          <p:cNvPr id="3" name="Title 2"/>
+          <p:cNvSpPr>
+            <a:spLocks noGrp="1"/>
+          </p:cNvSpPr>
+          <p:nvPr>
+            <p:ph type="title" idx="101"/>
           </p:nvPr>
         </p:nvSpPr>
         <p:spPr/>
@@ -8042,7 +8131,7 @@
           <a:lstStyle/>
           <a:p>
             <a:r>
-              <a:t>6. 정리와 연습</a:t>
+              <a:t>정리와 연습</a:t>
             </a:r>
           </a:p>
         </p:txBody>
@@ -8062,82 +8151,40 @@
           <a:bodyPr/>
           <a:lstStyle/>
           <a:p>
-            <a:pPr/>
-            <a:r>
-              <a:t>다익스트라: 미확정 노드 중 최근접 노드는 이미 최종 답</a:t>
-            </a:r>
-          </a:p>
-          <a:p>
-            <a:pPr lvl="1"/>
-            <a:r>
-              <a:t>성립 조건은 엣지 비용이 음수가 아닐 것</a:t>
-            </a:r>
-          </a:p>
-          <a:p>
-            <a:pPr/>
-            <a:r>
-              <a:t>질의 1회에 확정 4,500개, 경로에 쓰인 노드 83개</a:t>
-            </a:r>
-          </a:p>
-          <a:p>
-            <a:pPr/>
-            <a:r>
-              <a:t>A*는 확정 노드를 약 1.7배 줄이지만 파이썬에서는 더 느림</a:t>
-            </a:r>
-          </a:p>
-          <a:p>
-            <a:pPr/>
-            <a:r>
-              <a:t>무작위 노드 쌍의 6%는 경로 없음 — 시뮬레이터가 처리</a:t>
-            </a:r>
-          </a:p>
-        </p:txBody>
-      </p:sp>
-      <p:sp>
-        <p:nvSpPr>
-          <p:cNvPr id="25" name="Slide Number Placeholder 0"/>
-          <p:cNvSpPr>
-            <a:spLocks noGrp="1"/>
-          </p:cNvSpPr>
-          <p:nvPr>
-            <p:ph type="sldNum" sz="quarter" idx="4294967295"/>
-          </p:nvPr>
-        </p:nvSpPr>
-        <p:spPr>
-          <a:xfrm>
-            <a:off x="10591495" y="6355080"/>
-            <a:ext cx="914400" cy="274320"/>
-          </a:xfrm>
-          <a:prstGeom prst="rect">
-            <a:avLst/>
-          </a:prstGeom>
-          <a:extLst>
-            <a:ext uri="{C572A759-6A51-4108-AA02-DFA0A04FC94B}">
-              <ma14:wrappingTextBoxFlag xmlns:ma14="http://schemas.microsoft.com/office/mac/drawingml/2011/main" val="0"/>
-            </a:ext>
-          </a:extLst>
-        </p:spPr>
-        <p:txBody>
-          <a:bodyPr/>
-          <a:lstStyle>
-            <a:lvl1pPr>
-              <a:defRPr sz="1000">
+            <a:pPr>
+              <a:spcAft>
+                <a:spcPts val="1000"/>
+              </a:spcAft>
+            </a:pPr>
+            <a:r>
+              <a:rPr>
                 <a:solidFill>
                   <a:srgbClr val="AFAFAF"/>
                 </a:solidFill>
-                <a:latin typeface="Pretendard Medium"/>
-                <a:ea typeface="Pretendard Medium"/>
-                <a:cs typeface="Pretendard Medium"/>
-              </a:defRPr>
-            </a:lvl1pPr>
-          </a:lstStyle>
-          <a:p>
-            <a:pPr algn="r"/>
-            <a:fld id="{F7021451-1387-4CA6-816F-3879F97B5CBC}" type="slidenum">
-              <a:rPr b="0" lang="en-US"/>
-              <a:t>1004</a:t>
-            </a:fld>
-            <a:endParaRPr lang="en-US"/>
+              </a:rPr>
+              <a:t>6.1  </a:t>
+            </a:r>
+            <a:r>
+              <a:t>오늘의 정리</a:t>
+            </a:r>
+          </a:p>
+          <a:p>
+            <a:pPr>
+              <a:spcAft>
+                <a:spcPts val="1000"/>
+              </a:spcAft>
+            </a:pPr>
+            <a:r>
+              <a:rPr>
+                <a:solidFill>
+                  <a:srgbClr val="AFAFAF"/>
+                </a:solidFill>
+              </a:rPr>
+              <a:t>6.2  </a:t>
+            </a:r>
+            <a:r>
+              <a:t>연습과 다음 장</a:t>
+            </a:r>
           </a:p>
         </p:txBody>
       </p:sp>
@@ -8175,7 +8222,7 @@
           <a:lstStyle/>
           <a:p>
             <a:r>
-              <a:t>6.2 연습과 다음 장</a:t>
+              <a:t>6.1 오늘의 정리</a:t>
             </a:r>
           </a:p>
         </p:txBody>
@@ -8218,43 +8265,31 @@
           <a:p>
             <a:pPr/>
             <a:r>
-              <a:t>교재 연습문제</a:t>
+              <a:t>다익스트라: 미확정 노드 중 최근접 노드는 이미 최종 답</a:t>
             </a:r>
           </a:p>
           <a:p>
             <a:pPr lvl="1"/>
             <a:r>
-              <a:t>3.1 ★ 조기 종료 없는 일대다 탐색 — 확정 노드 수와 실행 시간 표</a:t>
-            </a:r>
-          </a:p>
-          <a:p>
-            <a:pPr lvl="1"/>
-            <a:r>
-              <a:t>3.2 ★★ 휴리스틱 1.5배 시 손실 — 불일치 건수와 확정 노드 감소율</a:t>
-            </a:r>
-          </a:p>
-          <a:p>
-            <a:pPr lvl="1"/>
-            <a:r>
-              <a:t>3.3 ★★★ 양방향 다익스트라와 종료 조건</a:t>
+              <a:t>성립 조건은 엣지 비용이 음수가 아닐 것</a:t>
             </a:r>
           </a:p>
           <a:p>
             <a:pPr/>
             <a:r>
-              <a:t>HW1 (4주차 09-22 마감) — B부가 오늘 구현한 다익스트라</a:t>
-            </a:r>
-          </a:p>
-          <a:p>
-            <a:pPr lvl="1"/>
-            <a:r>
-              <a:t>자가 채점 전체 통과, 막힌 지점 설명, 확정 노드 수 해석</a:t>
+              <a:t>질의 1회에 확정 4,500개, 경로에 쓰인 노드 83개</a:t>
             </a:r>
           </a:p>
           <a:p>
             <a:pPr/>
             <a:r>
-              <a:t>다음 장: 4장 시간대별 실측 속도를 반영한 경로 변화</a:t>
+              <a:t>A*는 확정 노드를 약 1.7배 줄이지만 파이썬에서는 더 느림</a:t>
+            </a:r>
+          </a:p>
+          <a:p>
+            <a:pPr/>
+            <a:r>
+              <a:t>무작위 노드 쌍의 6%는 경로 없음 — 시뮬레이터가 처리</a:t>
             </a:r>
           </a:p>
         </p:txBody>
@@ -8341,6 +8376,172 @@
           <a:lstStyle/>
           <a:p>
             <a:r>
+              <a:t>6.2 연습과 다음 장</a:t>
+            </a:r>
+          </a:p>
+        </p:txBody>
+      </p:sp>
+      <p:sp>
+        <p:nvSpPr>
+          <p:cNvPr id="3" name="Text Placeholder 2"/>
+          <p:cNvSpPr>
+            <a:spLocks noGrp="1"/>
+          </p:cNvSpPr>
+          <p:nvPr>
+            <p:ph type="body" idx="101"/>
+          </p:nvPr>
+        </p:nvSpPr>
+        <p:spPr/>
+        <p:txBody>
+          <a:bodyPr/>
+          <a:lstStyle/>
+          <a:p>
+            <a:r>
+              <a:t>6. 정리와 연습</a:t>
+            </a:r>
+          </a:p>
+        </p:txBody>
+      </p:sp>
+      <p:sp>
+        <p:nvSpPr>
+          <p:cNvPr id="4" name="Text Placeholder 3"/>
+          <p:cNvSpPr>
+            <a:spLocks noGrp="1"/>
+          </p:cNvSpPr>
+          <p:nvPr>
+            <p:ph type="body" idx="102"/>
+          </p:nvPr>
+        </p:nvSpPr>
+        <p:spPr/>
+        <p:txBody>
+          <a:bodyPr/>
+          <a:lstStyle/>
+          <a:p>
+            <a:pPr/>
+            <a:r>
+              <a:t>교재 연습문제</a:t>
+            </a:r>
+          </a:p>
+          <a:p>
+            <a:pPr lvl="1"/>
+            <a:r>
+              <a:t>3.1 ★ 조기 종료 없는 일대다 탐색 — 확정 노드 수와 실행 시간 표</a:t>
+            </a:r>
+          </a:p>
+          <a:p>
+            <a:pPr lvl="1"/>
+            <a:r>
+              <a:t>3.2 ★★ 휴리스틱 1.5배 시 손실 — 불일치 건수와 확정 노드 감소율</a:t>
+            </a:r>
+          </a:p>
+          <a:p>
+            <a:pPr lvl="1"/>
+            <a:r>
+              <a:t>3.3 ★★★ 양방향 다익스트라와 종료 조건</a:t>
+            </a:r>
+          </a:p>
+          <a:p>
+            <a:pPr/>
+            <a:r>
+              <a:t>HW1 (4주차 09-22 마감) — B부가 오늘 구현한 다익스트라</a:t>
+            </a:r>
+          </a:p>
+          <a:p>
+            <a:pPr lvl="1"/>
+            <a:r>
+              <a:t>자가 채점 전체 통과, 막힌 지점 설명, 확정 노드 수 해석</a:t>
+            </a:r>
+          </a:p>
+          <a:p>
+            <a:pPr/>
+            <a:r>
+              <a:t>다음 장: 4장 시간대별 실측 속도를 반영한 경로 변화</a:t>
+            </a:r>
+          </a:p>
+        </p:txBody>
+      </p:sp>
+      <p:sp>
+        <p:nvSpPr>
+          <p:cNvPr id="25" name="Slide Number Placeholder 0"/>
+          <p:cNvSpPr>
+            <a:spLocks noGrp="1"/>
+          </p:cNvSpPr>
+          <p:nvPr>
+            <p:ph type="sldNum" sz="quarter" idx="4294967295"/>
+          </p:nvPr>
+        </p:nvSpPr>
+        <p:spPr>
+          <a:xfrm>
+            <a:off x="10591495" y="6355080"/>
+            <a:ext cx="914400" cy="274320"/>
+          </a:xfrm>
+          <a:prstGeom prst="rect">
+            <a:avLst/>
+          </a:prstGeom>
+          <a:extLst>
+            <a:ext uri="{C572A759-6A51-4108-AA02-DFA0A04FC94B}">
+              <ma14:wrappingTextBoxFlag xmlns:ma14="http://schemas.microsoft.com/office/mac/drawingml/2011/main" val="0"/>
+            </a:ext>
+          </a:extLst>
+        </p:spPr>
+        <p:txBody>
+          <a:bodyPr/>
+          <a:lstStyle>
+            <a:lvl1pPr>
+              <a:defRPr sz="1000">
+                <a:solidFill>
+                  <a:srgbClr val="AFAFAF"/>
+                </a:solidFill>
+                <a:latin typeface="Pretendard Medium"/>
+                <a:ea typeface="Pretendard Medium"/>
+                <a:cs typeface="Pretendard Medium"/>
+              </a:defRPr>
+            </a:lvl1pPr>
+          </a:lstStyle>
+          <a:p>
+            <a:pPr algn="r"/>
+            <a:fld id="{F7021451-1387-4CA6-816F-3879F97B5CBC}" type="slidenum">
+              <a:rPr b="0" lang="en-US"/>
+              <a:t>1004</a:t>
+            </a:fld>
+            <a:endParaRPr lang="en-US"/>
+          </a:p>
+        </p:txBody>
+      </p:sp>
+    </p:spTree>
+  </p:cSld>
+  <p:clrMapOvr>
+    <a:masterClrMapping/>
+  </p:clrMapOvr>
+</p:sld>
+</file>
+
+<file path=ppt/slides/slide23.xml><?xml version="1.0" encoding="utf-8"?>
+<p:sld xmlns:a="http://schemas.openxmlformats.org/drawingml/2006/main" xmlns:p="http://schemas.openxmlformats.org/presentationml/2006/main" xmlns:r="http://schemas.openxmlformats.org/officeDocument/2006/relationships">
+  <p:cSld>
+    <p:spTree>
+      <p:nvGrpSpPr>
+        <p:cNvPr id="1" name=""/>
+        <p:cNvGrpSpPr/>
+        <p:nvPr/>
+      </p:nvGrpSpPr>
+      <p:grpSpPr/>
+      <p:sp>
+        <p:nvSpPr>
+          <p:cNvPr id="2" name="Title 1"/>
+          <p:cNvSpPr>
+            <a:spLocks noGrp="1"/>
+          </p:cNvSpPr>
+          <p:nvPr>
+            <p:ph type="title" idx="100"/>
+          </p:nvPr>
+        </p:nvSpPr>
+        <p:spPr/>
+        <p:txBody>
+          <a:bodyPr/>
+          <a:lstStyle/>
+          <a:p>
+            <a:r>
               <a:t>다음 주에 봅니다</a:t>
             </a:r>
           </a:p>
@@ -8498,6 +8699,24 @@
               <a:t>학습 목표</a:t>
             </a:r>
           </a:p>
+          <a:p>
+            <a:pPr>
+              <a:spcAft>
+                <a:spcPts val="1000"/>
+              </a:spcAft>
+            </a:pPr>
+            <a:r>
+              <a:rPr>
+                <a:solidFill>
+                  <a:srgbClr val="AFAFAF"/>
+                </a:solidFill>
+              </a:rPr>
+              <a:t>1.3  </a:t>
+            </a:r>
+            <a:r>
+              <a:t>교재와 실습을 여는 곳</a:t>
+            </a:r>
+          </a:p>
         </p:txBody>
       </p:sp>
     </p:spTree>
@@ -8816,12 +9035,12 @@
       <p:grpSpPr/>
       <p:sp>
         <p:nvSpPr>
-          <p:cNvPr id="2" name="Text Placeholder 1"/>
-          <p:cNvSpPr>
-            <a:spLocks noGrp="1"/>
-          </p:cNvSpPr>
-          <p:nvPr>
-            <p:ph type="body" idx="100"/>
+          <p:cNvPr id="2" name="Title 1"/>
+          <p:cNvSpPr>
+            <a:spLocks noGrp="1"/>
+          </p:cNvSpPr>
+          <p:nvPr>
+            <p:ph type="title" idx="100"/>
           </p:nvPr>
         </p:nvSpPr>
         <p:spPr/>
@@ -8830,19 +9049,19 @@
           <a:lstStyle/>
           <a:p>
             <a:r>
-              <a:t>02</a:t>
-            </a:r>
-          </a:p>
-        </p:txBody>
-      </p:sp>
-      <p:sp>
-        <p:nvSpPr>
-          <p:cNvPr id="3" name="Title 2"/>
-          <p:cNvSpPr>
-            <a:spLocks noGrp="1"/>
-          </p:cNvSpPr>
-          <p:nvPr>
-            <p:ph type="title" idx="101"/>
+              <a:t>1.3 교재와 실습을 여는 곳</a:t>
+            </a:r>
+          </a:p>
+        </p:txBody>
+      </p:sp>
+      <p:sp>
+        <p:nvSpPr>
+          <p:cNvPr id="3" name="Text Placeholder 2"/>
+          <p:cNvSpPr>
+            <a:spLocks noGrp="1"/>
+          </p:cNvSpPr>
+          <p:nvPr>
+            <p:ph type="body" idx="101"/>
           </p:nvPr>
         </p:nvSpPr>
         <p:spPr/>
@@ -8851,7 +9070,7 @@
           <a:lstStyle/>
           <a:p>
             <a:r>
-              <a:t>교재 3.1–3.2 문제와 아이디어</a:t>
+              <a:t>1. 도입과 학습 목표</a:t>
             </a:r>
           </a:p>
         </p:txBody>
@@ -8871,40 +9090,415 @@
           <a:bodyPr/>
           <a:lstStyle/>
           <a:p>
-            <a:pPr>
-              <a:spcAft>
-                <a:spcPts val="1000"/>
-              </a:spcAft>
-            </a:pPr>
-            <a:r>
-              <a:rPr>
+            <a:pPr/>
+            <a:r>
+              <a:t>저장소: github.com/jihoyeo/mobility-simulation-book — blob/main 아래 경로</a:t>
+            </a:r>
+          </a:p>
+          <a:p>
+            <a:pPr/>
+            <a:r>
+              <a:t>노트북 실행: jupyter lab labs/ch03_dijkstra.ipynb</a:t>
+            </a:r>
+          </a:p>
+          <a:p>
+            <a:pPr/>
+            <a:r>
+              <a:t>진행 순서: 슬라이드 개요 → 교재 본문 → 실습 노트북</a:t>
+            </a:r>
+          </a:p>
+          <a:p>
+            <a:pPr/>
+            <a:r>
+              <a:t>자가 채점: python labs/check.py ch03</a:t>
+            </a:r>
+          </a:p>
+        </p:txBody>
+      </p:sp>
+      <p:sp>
+        <p:nvSpPr>
+          <p:cNvPr id="5" name="Text Placeholder 4"/>
+          <p:cNvSpPr>
+            <a:spLocks noGrp="1"/>
+          </p:cNvSpPr>
+          <p:nvPr>
+            <p:ph type="body" idx="103"/>
+          </p:nvPr>
+        </p:nvSpPr>
+        <p:spPr/>
+        <p:txBody>
+          <a:bodyPr/>
+          <a:lstStyle/>
+          <a:p>
+            <a:r>
+              <a:t>표 1. 오늘 여는 파일과 경로</a:t>
+            </a:r>
+          </a:p>
+        </p:txBody>
+      </p:sp>
+      <p:graphicFrame>
+        <p:nvGraphicFramePr>
+          <p:cNvPr id="6" name="Table Placeholder 5"/>
+          <p:cNvGraphicFramePr>
+            <a:graphicFrameLocks noGrp="1"/>
+          </p:cNvGraphicFramePr>
+          <p:nvPr>
+            <p:ph type="tbl" idx="104"/>
+          </p:nvPr>
+        </p:nvGraphicFramePr>
+        <p:xfrm>
+          <a:off x="4937760" y="1828800"/>
+          <a:ext cx="6565392" cy="2311400"/>
+        </p:xfrm>
+        <a:graphic>
+          <a:graphicData uri="http://schemas.openxmlformats.org/drawingml/2006/table">
+            <a:tbl>
+              <a:tblPr firstRow="0" bandRow="0" firstCol="0" lastRow="0" lastCol="0" bandCol="0"/>
+              <a:tblGrid>
+                <a:gridCol w="3282696"/>
+                <a:gridCol w="3282696"/>
+              </a:tblGrid>
+              <a:tr h="406400">
+                <a:tc>
+                  <a:txBody>
+                    <a:bodyPr/>
+                    <a:lstStyle/>
+                    <a:p>
+                      <a:r>
+                        <a:rPr sz="1300" b="0">
+                          <a:solidFill>
+                            <a:srgbClr val="FFFFFF"/>
+                          </a:solidFill>
+                          <a:latin typeface="Pretendard Medium"/>
+                        </a:rPr>
+                        <a:t>자료</a:t>
+                      </a:r>
+                    </a:p>
+                  </a:txBody>
+                  <a:tcPr marL="101600" marR="101600" marT="76200" marB="76200" anchor="ctr">
+                    <a:solidFill>
+                      <a:srgbClr val="000000"/>
+                    </a:solidFill>
+                    <a:lnL w="0">
+                      <a:noFill/>
+                    </a:lnL>
+                    <a:lnR w="0">
+                      <a:noFill/>
+                    </a:lnR>
+                    <a:lnT w="0">
+                      <a:noFill/>
+                    </a:lnT>
+                    <a:lnB w="0">
+                      <a:noFill/>
+                    </a:lnB>
+                  </a:tcPr>
+                </a:tc>
+                <a:tc>
+                  <a:txBody>
+                    <a:bodyPr/>
+                    <a:lstStyle/>
+                    <a:p>
+                      <a:r>
+                        <a:rPr sz="1300" b="0">
+                          <a:solidFill>
+                            <a:srgbClr val="FFFFFF"/>
+                          </a:solidFill>
+                          <a:latin typeface="Pretendard Medium"/>
+                        </a:rPr>
+                        <a:t>경로</a:t>
+                      </a:r>
+                    </a:p>
+                  </a:txBody>
+                  <a:tcPr marL="101600" marR="101600" marT="76200" marB="76200" anchor="ctr">
+                    <a:solidFill>
+                      <a:srgbClr val="000000"/>
+                    </a:solidFill>
+                    <a:lnL w="0">
+                      <a:noFill/>
+                    </a:lnL>
+                    <a:lnR w="0">
+                      <a:noFill/>
+                    </a:lnR>
+                    <a:lnT w="0">
+                      <a:noFill/>
+                    </a:lnT>
+                    <a:lnB w="0">
+                      <a:noFill/>
+                    </a:lnB>
+                  </a:tcPr>
+                </a:tc>
+              </a:tr>
+              <a:tr h="635000">
+                <a:tc>
+                  <a:txBody>
+                    <a:bodyPr/>
+                    <a:lstStyle/>
+                    <a:p>
+                      <a:r>
+                        <a:rPr sz="1300" b="1">
+                          <a:solidFill>
+                            <a:srgbClr val="000000"/>
+                          </a:solidFill>
+                          <a:latin typeface="Pretendard"/>
+                        </a:rPr>
+                        <a:t>교재 원고</a:t>
+                      </a:r>
+                    </a:p>
+                  </a:txBody>
+                  <a:tcPr marL="101600" marR="101600" marT="101600" marB="101600" anchor="ctr">
+                    <a:solidFill>
+                      <a:srgbClr val="FFFFFF"/>
+                    </a:solidFill>
+                    <a:lnL w="0">
+                      <a:noFill/>
+                    </a:lnL>
+                    <a:lnR w="0">
+                      <a:noFill/>
+                    </a:lnR>
+                    <a:lnT w="0">
+                      <a:noFill/>
+                    </a:lnT>
+                    <a:lnB w="9525">
+                      <a:solidFill>
+                        <a:srgbClr val="E2E2E2"/>
+                      </a:solidFill>
+                    </a:lnB>
+                  </a:tcPr>
+                </a:tc>
+                <a:tc>
+                  <a:txBody>
+                    <a:bodyPr/>
+                    <a:lstStyle/>
+                    <a:p>
+                      <a:r>
+                        <a:rPr sz="1300" b="0">
+                          <a:solidFill>
+                            <a:srgbClr val="5E5E5E"/>
+                          </a:solidFill>
+                          <a:latin typeface="Pretendard Medium"/>
+                        </a:rPr>
+                        <a:t>ko/ch03_dijkstra.md</a:t>
+                      </a:r>
+                    </a:p>
+                  </a:txBody>
+                  <a:tcPr marL="101600" marR="101600" marT="101600" marB="101600" anchor="ctr">
+                    <a:solidFill>
+                      <a:srgbClr val="FFFFFF"/>
+                    </a:solidFill>
+                    <a:lnL w="0">
+                      <a:noFill/>
+                    </a:lnL>
+                    <a:lnR w="0">
+                      <a:noFill/>
+                    </a:lnR>
+                    <a:lnT w="0">
+                      <a:noFill/>
+                    </a:lnT>
+                    <a:lnB w="9525">
+                      <a:solidFill>
+                        <a:srgbClr val="E2E2E2"/>
+                      </a:solidFill>
+                    </a:lnB>
+                  </a:tcPr>
+                </a:tc>
+              </a:tr>
+              <a:tr h="635000">
+                <a:tc>
+                  <a:txBody>
+                    <a:bodyPr/>
+                    <a:lstStyle/>
+                    <a:p>
+                      <a:r>
+                        <a:rPr sz="1300" b="1">
+                          <a:solidFill>
+                            <a:srgbClr val="000000"/>
+                          </a:solidFill>
+                          <a:latin typeface="Pretendard"/>
+                        </a:rPr>
+                        <a:t>실습 노트북</a:t>
+                      </a:r>
+                    </a:p>
+                  </a:txBody>
+                  <a:tcPr marL="101600" marR="101600" marT="101600" marB="101600" anchor="ctr">
+                    <a:solidFill>
+                      <a:srgbClr val="FFFFFF"/>
+                    </a:solidFill>
+                    <a:lnL w="0">
+                      <a:noFill/>
+                    </a:lnL>
+                    <a:lnR w="0">
+                      <a:noFill/>
+                    </a:lnR>
+                    <a:lnT w="0">
+                      <a:noFill/>
+                    </a:lnT>
+                    <a:lnB w="9525">
+                      <a:solidFill>
+                        <a:srgbClr val="E2E2E2"/>
+                      </a:solidFill>
+                    </a:lnB>
+                  </a:tcPr>
+                </a:tc>
+                <a:tc>
+                  <a:txBody>
+                    <a:bodyPr/>
+                    <a:lstStyle/>
+                    <a:p>
+                      <a:r>
+                        <a:rPr sz="1300" b="0">
+                          <a:solidFill>
+                            <a:srgbClr val="5E5E5E"/>
+                          </a:solidFill>
+                          <a:latin typeface="Pretendard Medium"/>
+                        </a:rPr>
+                        <a:t>labs/ch03_dijkstra.ipynb</a:t>
+                      </a:r>
+                    </a:p>
+                  </a:txBody>
+                  <a:tcPr marL="101600" marR="101600" marT="101600" marB="101600" anchor="ctr">
+                    <a:solidFill>
+                      <a:srgbClr val="FFFFFF"/>
+                    </a:solidFill>
+                    <a:lnL w="0">
+                      <a:noFill/>
+                    </a:lnL>
+                    <a:lnR w="0">
+                      <a:noFill/>
+                    </a:lnR>
+                    <a:lnT w="0">
+                      <a:noFill/>
+                    </a:lnT>
+                    <a:lnB w="9525">
+                      <a:solidFill>
+                        <a:srgbClr val="E2E2E2"/>
+                      </a:solidFill>
+                    </a:lnB>
+                  </a:tcPr>
+                </a:tc>
+              </a:tr>
+              <a:tr h="635000">
+                <a:tc>
+                  <a:txBody>
+                    <a:bodyPr/>
+                    <a:lstStyle/>
+                    <a:p>
+                      <a:r>
+                        <a:rPr sz="1300" b="1">
+                          <a:solidFill>
+                            <a:srgbClr val="000000"/>
+                          </a:solidFill>
+                          <a:latin typeface="Pretendard"/>
+                        </a:rPr>
+                        <a:t>채점 파일</a:t>
+                      </a:r>
+                    </a:p>
+                  </a:txBody>
+                  <a:tcPr marL="101600" marR="101600" marT="101600" marB="101600" anchor="ctr">
+                    <a:solidFill>
+                      <a:srgbClr val="FFFFFF"/>
+                    </a:solidFill>
+                    <a:lnL w="0">
+                      <a:noFill/>
+                    </a:lnL>
+                    <a:lnR w="0">
+                      <a:noFill/>
+                    </a:lnR>
+                    <a:lnT w="0">
+                      <a:noFill/>
+                    </a:lnT>
+                    <a:lnB w="9525">
+                      <a:solidFill>
+                        <a:srgbClr val="E2E2E2"/>
+                      </a:solidFill>
+                    </a:lnB>
+                  </a:tcPr>
+                </a:tc>
+                <a:tc>
+                  <a:txBody>
+                    <a:bodyPr/>
+                    <a:lstStyle/>
+                    <a:p>
+                      <a:r>
+                        <a:rPr sz="1300" b="0">
+                          <a:solidFill>
+                            <a:srgbClr val="5E5E5E"/>
+                          </a:solidFill>
+                          <a:latin typeface="Pretendard Medium"/>
+                        </a:rPr>
+                        <a:t>labs/ch03_dijkstra.py</a:t>
+                      </a:r>
+                    </a:p>
+                  </a:txBody>
+                  <a:tcPr marL="101600" marR="101600" marT="101600" marB="101600" anchor="ctr">
+                    <a:solidFill>
+                      <a:srgbClr val="FFFFFF"/>
+                    </a:solidFill>
+                    <a:lnL w="0">
+                      <a:noFill/>
+                    </a:lnL>
+                    <a:lnR w="0">
+                      <a:noFill/>
+                    </a:lnR>
+                    <a:lnT w="0">
+                      <a:noFill/>
+                    </a:lnT>
+                    <a:lnB w="9525">
+                      <a:solidFill>
+                        <a:srgbClr val="E2E2E2"/>
+                      </a:solidFill>
+                    </a:lnB>
+                  </a:tcPr>
+                </a:tc>
+              </a:tr>
+            </a:tbl>
+          </a:graphicData>
+        </a:graphic>
+      </p:graphicFrame>
+      <p:sp>
+        <p:nvSpPr>
+          <p:cNvPr id="25" name="Slide Number Placeholder 0"/>
+          <p:cNvSpPr>
+            <a:spLocks noGrp="1"/>
+          </p:cNvSpPr>
+          <p:nvPr>
+            <p:ph type="sldNum" sz="quarter" idx="4294967295"/>
+          </p:nvPr>
+        </p:nvSpPr>
+        <p:spPr>
+          <a:xfrm>
+            <a:off x="10591495" y="6355080"/>
+            <a:ext cx="914400" cy="274320"/>
+          </a:xfrm>
+          <a:prstGeom prst="rect">
+            <a:avLst/>
+          </a:prstGeom>
+          <a:extLst>
+            <a:ext uri="{C572A759-6A51-4108-AA02-DFA0A04FC94B}">
+              <ma14:wrappingTextBoxFlag xmlns:ma14="http://schemas.microsoft.com/office/mac/drawingml/2011/main" val="0"/>
+            </a:ext>
+          </a:extLst>
+        </p:spPr>
+        <p:txBody>
+          <a:bodyPr/>
+          <a:lstStyle>
+            <a:lvl1pPr>
+              <a:defRPr sz="1000">
                 <a:solidFill>
                   <a:srgbClr val="AFAFAF"/>
                 </a:solidFill>
-              </a:rPr>
-              <a:t>2.1  </a:t>
-            </a:r>
-            <a:r>
-              <a:t>다익스트라의 근거</a:t>
-            </a:r>
-          </a:p>
-          <a:p>
-            <a:pPr>
-              <a:spcAft>
-                <a:spcPts val="1000"/>
-              </a:spcAft>
-            </a:pPr>
-            <a:r>
-              <a:rPr>
-                <a:solidFill>
-                  <a:srgbClr val="AFAFAF"/>
-                </a:solidFill>
-              </a:rPr>
-              <a:t>2.2  </a:t>
-            </a:r>
-            <a:r>
-              <a:t>알고리즘 네 단계</a:t>
-            </a:r>
+                <a:latin typeface="Pretendard Medium"/>
+                <a:ea typeface="Pretendard Medium"/>
+                <a:cs typeface="Pretendard Medium"/>
+              </a:defRPr>
+            </a:lvl1pPr>
+          </a:lstStyle>
+          <a:p>
+            <a:pPr algn="r"/>
+            <a:fld id="{F7021451-1387-4CA6-816F-3879F97B5CBC}" type="slidenum">
+              <a:rPr b="0" lang="en-US"/>
+              <a:t>1008</a:t>
+            </a:fld>
+            <a:endParaRPr lang="en-US"/>
           </a:p>
         </p:txBody>
       </p:sp>
@@ -8928,12 +9522,12 @@
       <p:grpSpPr/>
       <p:sp>
         <p:nvSpPr>
-          <p:cNvPr id="2" name="Title 1"/>
-          <p:cNvSpPr>
-            <a:spLocks noGrp="1"/>
-          </p:cNvSpPr>
-          <p:nvPr>
-            <p:ph type="title" idx="100"/>
+          <p:cNvPr id="2" name="Text Placeholder 1"/>
+          <p:cNvSpPr>
+            <a:spLocks noGrp="1"/>
+          </p:cNvSpPr>
+          <p:nvPr>
+            <p:ph type="body" idx="100"/>
           </p:nvPr>
         </p:nvSpPr>
         <p:spPr/>
@@ -8942,19 +9536,19 @@
           <a:lstStyle/>
           <a:p>
             <a:r>
-              <a:t>2.1 다익스트라의 근거</a:t>
-            </a:r>
-          </a:p>
-        </p:txBody>
-      </p:sp>
-      <p:sp>
-        <p:nvSpPr>
-          <p:cNvPr id="3" name="Text Placeholder 2"/>
-          <p:cNvSpPr>
-            <a:spLocks noGrp="1"/>
-          </p:cNvSpPr>
-          <p:nvPr>
-            <p:ph type="body" idx="101"/>
+              <a:t>02</a:t>
+            </a:r>
+          </a:p>
+        </p:txBody>
+      </p:sp>
+      <p:sp>
+        <p:nvSpPr>
+          <p:cNvPr id="3" name="Title 2"/>
+          <p:cNvSpPr>
+            <a:spLocks noGrp="1"/>
+          </p:cNvSpPr>
+          <p:nvPr>
+            <p:ph type="title" idx="101"/>
           </p:nvPr>
         </p:nvSpPr>
         <p:spPr/>
@@ -8963,7 +9557,7 @@
           <a:lstStyle/>
           <a:p>
             <a:r>
-              <a:t>2. 교재 3.1–3.2 문제와 아이디어</a:t>
+              <a:t>교재 3.1–3.2 문제와 아이디어</a:t>
             </a:r>
           </a:p>
         </p:txBody>
@@ -8983,82 +9577,40 @@
           <a:bodyPr/>
           <a:lstStyle/>
           <a:p>
-            <a:pPr/>
-            <a:r>
-              <a:t>명제: 미확정 노드 중 최근접 노드의 현재 거리 = 최종 답</a:t>
-            </a:r>
-          </a:p>
-          <a:p>
-            <a:pPr/>
-            <a:r>
-              <a:t>근거: 더 짧은 경로가 있다면 미확정 노드를 경유해야 함</a:t>
-            </a:r>
-          </a:p>
-          <a:p>
-            <a:pPr lvl="1"/>
-            <a:r>
-              <a:t>그 경유 노드는 현재 노드보다 멀리 있음</a:t>
-            </a:r>
-          </a:p>
-          <a:p>
-            <a:pPr lvl="1"/>
-            <a:r>
-              <a:t>엣지 비용이 음수가 아니므로 우회로 단축 불가</a:t>
-            </a:r>
-          </a:p>
-          <a:p>
-            <a:pPr/>
-            <a:r>
-              <a:t>전제: 음수 비용 없음 — 소요시간에는 항상 성립</a:t>
-            </a:r>
-          </a:p>
-        </p:txBody>
-      </p:sp>
-      <p:sp>
-        <p:nvSpPr>
-          <p:cNvPr id="25" name="Slide Number Placeholder 0"/>
-          <p:cNvSpPr>
-            <a:spLocks noGrp="1"/>
-          </p:cNvSpPr>
-          <p:nvPr>
-            <p:ph type="sldNum" sz="quarter" idx="4294967295"/>
-          </p:nvPr>
-        </p:nvSpPr>
-        <p:spPr>
-          <a:xfrm>
-            <a:off x="10591495" y="6355080"/>
-            <a:ext cx="914400" cy="274320"/>
-          </a:xfrm>
-          <a:prstGeom prst="rect">
-            <a:avLst/>
-          </a:prstGeom>
-          <a:extLst>
-            <a:ext uri="{C572A759-6A51-4108-AA02-DFA0A04FC94B}">
-              <ma14:wrappingTextBoxFlag xmlns:ma14="http://schemas.microsoft.com/office/mac/drawingml/2011/main" val="0"/>
-            </a:ext>
-          </a:extLst>
-        </p:spPr>
-        <p:txBody>
-          <a:bodyPr/>
-          <a:lstStyle>
-            <a:lvl1pPr>
-              <a:defRPr sz="1000">
+            <a:pPr>
+              <a:spcAft>
+                <a:spcPts val="1000"/>
+              </a:spcAft>
+            </a:pPr>
+            <a:r>
+              <a:rPr>
                 <a:solidFill>
                   <a:srgbClr val="AFAFAF"/>
                 </a:solidFill>
-                <a:latin typeface="Pretendard Medium"/>
-                <a:ea typeface="Pretendard Medium"/>
-                <a:cs typeface="Pretendard Medium"/>
-              </a:defRPr>
-            </a:lvl1pPr>
-          </a:lstStyle>
-          <a:p>
-            <a:pPr algn="r"/>
-            <a:fld id="{F7021451-1387-4CA6-816F-3879F97B5CBC}" type="slidenum">
-              <a:rPr b="0" lang="en-US"/>
-              <a:t>1004</a:t>
-            </a:fld>
-            <a:endParaRPr lang="en-US"/>
+              </a:rPr>
+              <a:t>2.1  </a:t>
+            </a:r>
+            <a:r>
+              <a:t>다익스트라의 근거</a:t>
+            </a:r>
+          </a:p>
+          <a:p>
+            <a:pPr>
+              <a:spcAft>
+                <a:spcPts val="1000"/>
+              </a:spcAft>
+            </a:pPr>
+            <a:r>
+              <a:rPr>
+                <a:solidFill>
+                  <a:srgbClr val="AFAFAF"/>
+                </a:solidFill>
+              </a:rPr>
+              <a:t>2.2  </a:t>
+            </a:r>
+            <a:r>
+              <a:t>알고리즘 네 단계</a:t>
+            </a:r>
           </a:p>
         </p:txBody>
       </p:sp>
@@ -9096,7 +9648,7 @@
           <a:lstStyle/>
           <a:p>
             <a:r>
-              <a:t>2.2 알고리즘 네 단계</a:t>
+              <a:t>2.1 다익스트라의 근거</a:t>
             </a:r>
           </a:p>
         </p:txBody>
@@ -9139,25 +9691,31 @@
           <a:p>
             <a:pPr/>
             <a:r>
-              <a:t>1단계: 출발점 거리 0, 나머지 무한대</a:t>
+              <a:t>명제: 미확정 노드 중 최근접 노드의 현재 거리 = 최종 답</a:t>
             </a:r>
           </a:p>
           <a:p>
             <a:pPr/>
             <a:r>
-              <a:t>2단계: 미확정 노드 중 최소 거리 노드를 추출해 확정</a:t>
+              <a:t>근거: 더 짧은 경로가 있다면 미확정 노드를 경유해야 함</a:t>
+            </a:r>
+          </a:p>
+          <a:p>
+            <a:pPr lvl="1"/>
+            <a:r>
+              <a:t>그 경유 노드는 현재 노드보다 멀리 있음</a:t>
+            </a:r>
+          </a:p>
+          <a:p>
+            <a:pPr lvl="1"/>
+            <a:r>
+              <a:t>엣지 비용이 음수가 아니므로 우회로 단축 불가</a:t>
             </a:r>
           </a:p>
           <a:p>
             <a:pPr/>
             <a:r>
-              <a:t>3단계: 이웃마다 경유 시 단축 여부를 확인하고 갱신</a:t>
-            </a:r>
-          </a:p>
-          <a:p>
-            <a:pPr/>
-            <a:r>
-              <a:t>4단계: 도착점을 추출하면 종료</a:t>
+              <a:t>전제: 음수 비용 없음 — 소요시간에는 항상 성립</a:t>
             </a:r>
           </a:p>
         </p:txBody>
@@ -9230,12 +9788,12 @@
       <p:grpSpPr/>
       <p:sp>
         <p:nvSpPr>
-          <p:cNvPr id="2" name="Text Placeholder 1"/>
-          <p:cNvSpPr>
-            <a:spLocks noGrp="1"/>
-          </p:cNvSpPr>
-          <p:nvPr>
-            <p:ph type="body" idx="100"/>
+          <p:cNvPr id="2" name="Title 1"/>
+          <p:cNvSpPr>
+            <a:spLocks noGrp="1"/>
+          </p:cNvSpPr>
+          <p:nvPr>
+            <p:ph type="title" idx="100"/>
           </p:nvPr>
         </p:nvSpPr>
         <p:spPr/>
@@ -9244,19 +9802,19 @@
           <a:lstStyle/>
           <a:p>
             <a:r>
-              <a:t>03</a:t>
-            </a:r>
-          </a:p>
-        </p:txBody>
-      </p:sp>
-      <p:sp>
-        <p:nvSpPr>
-          <p:cNvPr id="3" name="Title 2"/>
-          <p:cNvSpPr>
-            <a:spLocks noGrp="1"/>
-          </p:cNvSpPr>
-          <p:nvPr>
-            <p:ph type="title" idx="101"/>
+              <a:t>2.2 알고리즘 네 단계</a:t>
+            </a:r>
+          </a:p>
+        </p:txBody>
+      </p:sp>
+      <p:sp>
+        <p:nvSpPr>
+          <p:cNvPr id="3" name="Text Placeholder 2"/>
+          <p:cNvSpPr>
+            <a:spLocks noGrp="1"/>
+          </p:cNvSpPr>
+          <p:nvPr>
+            <p:ph type="body" idx="101"/>
           </p:nvPr>
         </p:nvSpPr>
         <p:spPr/>
@@ -9265,7 +9823,7 @@
           <a:lstStyle/>
           <a:p>
             <a:r>
-              <a:t>교재 3.3–3.4 구현과 검증</a:t>
+              <a:t>2. 교재 3.1–3.2 문제와 아이디어</a:t>
             </a:r>
           </a:p>
         </p:txBody>
@@ -9285,58 +9843,76 @@
           <a:bodyPr/>
           <a:lstStyle/>
           <a:p>
-            <a:pPr>
-              <a:spcAft>
-                <a:spcPts val="1000"/>
-              </a:spcAft>
-            </a:pPr>
-            <a:r>
-              <a:rPr>
+            <a:pPr/>
+            <a:r>
+              <a:t>1단계: 출발점 거리 0, 나머지 무한대</a:t>
+            </a:r>
+          </a:p>
+          <a:p>
+            <a:pPr/>
+            <a:r>
+              <a:t>2단계: 미확정 노드 중 최소 거리 노드를 추출해 확정</a:t>
+            </a:r>
+          </a:p>
+          <a:p>
+            <a:pPr/>
+            <a:r>
+              <a:t>3단계: 이웃마다 경유 시 단축 여부를 확인하고 갱신</a:t>
+            </a:r>
+          </a:p>
+          <a:p>
+            <a:pPr/>
+            <a:r>
+              <a:t>4단계: 도착점을 추출하면 종료</a:t>
+            </a:r>
+          </a:p>
+        </p:txBody>
+      </p:sp>
+      <p:sp>
+        <p:nvSpPr>
+          <p:cNvPr id="25" name="Slide Number Placeholder 0"/>
+          <p:cNvSpPr>
+            <a:spLocks noGrp="1"/>
+          </p:cNvSpPr>
+          <p:nvPr>
+            <p:ph type="sldNum" sz="quarter" idx="4294967295"/>
+          </p:nvPr>
+        </p:nvSpPr>
+        <p:spPr>
+          <a:xfrm>
+            <a:off x="10591495" y="6355080"/>
+            <a:ext cx="914400" cy="274320"/>
+          </a:xfrm>
+          <a:prstGeom prst="rect">
+            <a:avLst/>
+          </a:prstGeom>
+          <a:extLst>
+            <a:ext uri="{C572A759-6A51-4108-AA02-DFA0A04FC94B}">
+              <ma14:wrappingTextBoxFlag xmlns:ma14="http://schemas.microsoft.com/office/mac/drawingml/2011/main" val="0"/>
+            </a:ext>
+          </a:extLst>
+        </p:spPr>
+        <p:txBody>
+          <a:bodyPr/>
+          <a:lstStyle>
+            <a:lvl1pPr>
+              <a:defRPr sz="1000">
                 <a:solidFill>
                   <a:srgbClr val="AFAFAF"/>
                 </a:solidFill>
-              </a:rPr>
-              <a:t>3.1  </a:t>
-            </a:r>
-            <a:r>
-              <a:t>구현 결과</a:t>
-            </a:r>
-          </a:p>
-          <a:p>
-            <a:pPr>
-              <a:spcAft>
-                <a:spcPts val="1000"/>
-              </a:spcAft>
-            </a:pPr>
-            <a:r>
-              <a:rPr>
-                <a:solidFill>
-                  <a:srgbClr val="AFAFAF"/>
-                </a:solidFill>
-              </a:rPr>
-              <a:t>3.2  </a:t>
-            </a:r>
-            <a:r>
-              <a:t>경로 연결 검증</a:t>
-            </a:r>
-          </a:p>
-          <a:p>
-            <a:pPr>
-              <a:spcAft>
-                <a:spcPts val="1000"/>
-              </a:spcAft>
-            </a:pPr>
-            <a:r>
-              <a:rPr>
-                <a:solidFill>
-                  <a:srgbClr val="AFAFAF"/>
-                </a:solidFill>
-              </a:rPr>
-              <a:t>3.3  </a:t>
-            </a:r>
-            <a:r>
-              <a:t>NetworkX 대조</a:t>
-            </a:r>
+                <a:latin typeface="Pretendard Medium"/>
+                <a:ea typeface="Pretendard Medium"/>
+                <a:cs typeface="Pretendard Medium"/>
+              </a:defRPr>
+            </a:lvl1pPr>
+          </a:lstStyle>
+          <a:p>
+            <a:pPr algn="r"/>
+            <a:fld id="{F7021451-1387-4CA6-816F-3879F97B5CBC}" type="slidenum">
+              <a:rPr b="0" lang="en-US"/>
+              <a:t>1004</a:t>
+            </a:fld>
+            <a:endParaRPr lang="en-US"/>
           </a:p>
         </p:txBody>
       </p:sp>
